--- a/submission/07_sept/01_presentation.pptx
+++ b/submission/07_sept/01_presentation.pptx
@@ -11575,7 +11575,7 @@
                 </a:solidFill>
                 <a:latin typeface="Calibri"/>
               </a:rPr>
-              <a:t>confirm_days=2 даёт 0.05–0.07 сигн./нед — в 15–30× ниже цели 1–2/нед. Relaxed вариант (confirm_days=0) даёт ~0.46 сигн./нед, но CI не проходит 1.0 на OOT. Продуктовый выбор: редкий и надёжный vs. частый и менее точный.</a:t>
+              <a:t>confirm_days=2 даёт 0.05–0.07 сигн./нед — в 15–30× ниже цели 1–2/нед. Проверен relaxed вариант (confirm_days=0): 0.37–0.42 сигн./нед (6–7×), но CI &lt; 1.0 на всех коридорах и bps отрицательный (клиент теряет 5–35 бп). c0 статистически и экономически не валидирован — c2 единственный обоснованный выбор.</a:t>
             </a:r>
           </a:p>
         </p:txBody>
@@ -11610,7 +11610,7 @@
                 </a:solidFill>
                 <a:latin typeface="Calibri"/>
               </a:rPr>
-              <a:t>2. bps отрицательный на h=5</a:t>
+              <a:t>2. bps подтверждён положительным</a:t>
             </a:r>
           </a:p>
         </p:txBody>
@@ -11645,7 +11645,7 @@
                 </a:solidFill>
                 <a:latin typeface="Calibri"/>
               </a:rPr>
-              <a:t>Hit rate &gt; 50% подтверждён на KGS/TJS, но средняя выгода в базисных пунктах отрицательна на h=5 — сигнал угадывает направление, но приходит после выгодного движения. На h=10/20 bps улучшается.</a:t>
+              <a:t>Экономический эффект c2: KGS +41/+64 бп (h=5/10), TJS +69/+96 бп, AMD +26/+52 бп. Сигнал идентифицирует локальное дно — рубль укреплялся 2 дня, затем откатывается. Клиент, действующий по сигналу, платит на 40–96 бп меньше среднего курса следующих 10 дней.</a:t>
             </a:r>
           </a:p>
         </p:txBody>
